--- a/images/Image.pptx
+++ b/images/Image.pptx
@@ -5,7 +5,7 @@
     <p:sldMasterId id="2147483648" r:id="rId1"/>
   </p:sldMasterIdLst>
   <p:sldIdLst>
-    <p:sldId id="256" r:id="rId2"/>
+    <p:sldId id="257" r:id="rId2"/>
   </p:sldIdLst>
   <p:sldSz cx="12192000" cy="6858000"/>
   <p:notesSz cx="6858000" cy="9144000"/>
@@ -104,20 +104,33 @@
       </a:defRPr>
     </a:lvl9pPr>
   </p:defaultTextStyle>
+  <p:extLst>
+    <p:ext uri="{EFAFB233-063F-42B5-8137-9DF3F51BA10A}">
+      <p15:sldGuideLst xmlns:p15="http://schemas.microsoft.com/office/powerpoint/2012/main"/>
+    </p:ext>
+  </p:extLst>
 </p:presentation>
+</file>
+
+<file path=ppt/revisionInfo.xml><?xml version="1.0" encoding="utf-8"?>
+<p1510:revInfo xmlns:a="http://schemas.openxmlformats.org/drawingml/2006/main" xmlns:r="http://schemas.openxmlformats.org/officeDocument/2006/relationships" xmlns:p1510="http://schemas.microsoft.com/office/powerpoint/2015/10/main">
+  <p1510:revLst>
+    <p1510:client id="{9CF030C9-367D-495E-B20D-BC54B62DDF2A}" v="4" dt="2026-07-14T01:08:22.996"/>
+  </p1510:revLst>
+</p1510:revInfo>
 </file>
 
 <file path=ppt/changesInfos/changesInfo1.xml><?xml version="1.0" encoding="utf-8"?>
 <pc:chgInfo xmlns:a="http://schemas.openxmlformats.org/drawingml/2006/main" xmlns:r="http://schemas.openxmlformats.org/officeDocument/2006/relationships" xmlns:ac="http://schemas.microsoft.com/office/drawing/2013/main/command" xmlns:pc="http://schemas.microsoft.com/office/powerpoint/2013/main/command">
   <pc:docChgLst>
     <pc:chgData name="光 早坂" userId="ee7ba7153b69d20d" providerId="LiveId" clId="{B45034A4-39E7-40CC-89FD-F101C2A495B7}"/>
-    <pc:docChg chg="modSld">
-      <pc:chgData name="光 早坂" userId="ee7ba7153b69d20d" providerId="LiveId" clId="{B45034A4-39E7-40CC-89FD-F101C2A495B7}" dt="2026-07-13T17:39:57.368" v="4" actId="1076"/>
+    <pc:docChg chg="undo custSel addSld delSld modSld">
+      <pc:chgData name="光 早坂" userId="ee7ba7153b69d20d" providerId="LiveId" clId="{B45034A4-39E7-40CC-89FD-F101C2A495B7}" dt="2026-07-14T01:20:27.996" v="107" actId="47"/>
       <pc:docMkLst>
         <pc:docMk/>
       </pc:docMkLst>
-      <pc:sldChg chg="addSp modSp mod">
-        <pc:chgData name="光 早坂" userId="ee7ba7153b69d20d" providerId="LiveId" clId="{B45034A4-39E7-40CC-89FD-F101C2A495B7}" dt="2026-07-13T17:39:57.368" v="4" actId="1076"/>
+      <pc:sldChg chg="addSp modSp del mod">
+        <pc:chgData name="光 早坂" userId="ee7ba7153b69d20d" providerId="LiveId" clId="{B45034A4-39E7-40CC-89FD-F101C2A495B7}" dt="2026-07-14T01:20:27.996" v="107" actId="47"/>
         <pc:sldMkLst>
           <pc:docMk/>
           <pc:sldMk cId="3057863855" sldId="256"/>
@@ -144,6 +157,117 @@
             <pc:docMk/>
             <pc:sldMk cId="3057863855" sldId="256"/>
             <ac:picMk id="9" creationId="{CF031190-21E6-66E2-B896-2145DE77E491}"/>
+          </ac:picMkLst>
+        </pc:picChg>
+      </pc:sldChg>
+      <pc:sldChg chg="addSp delSp modSp new mod">
+        <pc:chgData name="光 早坂" userId="ee7ba7153b69d20d" providerId="LiveId" clId="{B45034A4-39E7-40CC-89FD-F101C2A495B7}" dt="2026-07-14T01:20:24.440" v="106" actId="1076"/>
+        <pc:sldMkLst>
+          <pc:docMk/>
+          <pc:sldMk cId="4059482414" sldId="257"/>
+        </pc:sldMkLst>
+        <pc:spChg chg="add mod">
+          <ac:chgData name="光 早坂" userId="ee7ba7153b69d20d" providerId="LiveId" clId="{B45034A4-39E7-40CC-89FD-F101C2A495B7}" dt="2026-07-14T01:08:22.996" v="13" actId="767"/>
+          <ac:spMkLst>
+            <pc:docMk/>
+            <pc:sldMk cId="4059482414" sldId="257"/>
+            <ac:spMk id="8" creationId="{A1D7DB97-393C-87F4-119C-CDAEFEE06BF7}"/>
+          </ac:spMkLst>
+        </pc:spChg>
+        <pc:spChg chg="add mod">
+          <ac:chgData name="光 早坂" userId="ee7ba7153b69d20d" providerId="LiveId" clId="{B45034A4-39E7-40CC-89FD-F101C2A495B7}" dt="2026-07-14T01:20:24.440" v="106" actId="1076"/>
+          <ac:spMkLst>
+            <pc:docMk/>
+            <pc:sldMk cId="4059482414" sldId="257"/>
+            <ac:spMk id="9" creationId="{AB039B30-9F3D-0932-DBD6-2A6F9118CDB8}"/>
+          </ac:spMkLst>
+        </pc:spChg>
+        <pc:picChg chg="add del mod">
+          <ac:chgData name="光 早坂" userId="ee7ba7153b69d20d" providerId="LiveId" clId="{B45034A4-39E7-40CC-89FD-F101C2A495B7}" dt="2026-07-14T01:10:34.398" v="27" actId="478"/>
+          <ac:picMkLst>
+            <pc:docMk/>
+            <pc:sldMk cId="4059482414" sldId="257"/>
+            <ac:picMk id="3" creationId="{038CC6F0-2202-2991-1C17-3B8D256B3858}"/>
+          </ac:picMkLst>
+        </pc:picChg>
+        <pc:picChg chg="add del mod ord">
+          <ac:chgData name="光 早坂" userId="ee7ba7153b69d20d" providerId="LiveId" clId="{B45034A4-39E7-40CC-89FD-F101C2A495B7}" dt="2026-07-14T01:12:04.289" v="35" actId="478"/>
+          <ac:picMkLst>
+            <pc:docMk/>
+            <pc:sldMk cId="4059482414" sldId="257"/>
+            <ac:picMk id="5" creationId="{A23A1936-0B24-33E3-B7B5-CBC5F1AA0AA1}"/>
+          </ac:picMkLst>
+        </pc:picChg>
+        <pc:picChg chg="add mod ord modCrop">
+          <ac:chgData name="光 早坂" userId="ee7ba7153b69d20d" providerId="LiveId" clId="{B45034A4-39E7-40CC-89FD-F101C2A495B7}" dt="2026-07-14T01:20:24.440" v="106" actId="1076"/>
+          <ac:picMkLst>
+            <pc:docMk/>
+            <pc:sldMk cId="4059482414" sldId="257"/>
+            <ac:picMk id="7" creationId="{95CA6781-FB63-C171-7349-BA10EFAB1099}"/>
+          </ac:picMkLst>
+        </pc:picChg>
+        <pc:picChg chg="add del">
+          <ac:chgData name="光 早坂" userId="ee7ba7153b69d20d" providerId="LiveId" clId="{B45034A4-39E7-40CC-89FD-F101C2A495B7}" dt="2026-07-14T01:10:28.471" v="25" actId="22"/>
+          <ac:picMkLst>
+            <pc:docMk/>
+            <pc:sldMk cId="4059482414" sldId="257"/>
+            <ac:picMk id="11" creationId="{66EA1311-587B-A220-8CD3-46A108104948}"/>
+          </ac:picMkLst>
+        </pc:picChg>
+        <pc:picChg chg="add del ord">
+          <ac:chgData name="光 早坂" userId="ee7ba7153b69d20d" providerId="LiveId" clId="{B45034A4-39E7-40CC-89FD-F101C2A495B7}" dt="2026-07-14T01:12:46.333" v="38" actId="478"/>
+          <ac:picMkLst>
+            <pc:docMk/>
+            <pc:sldMk cId="4059482414" sldId="257"/>
+            <ac:picMk id="13" creationId="{08025D7F-0C60-DA56-5531-E845C5680001}"/>
+          </ac:picMkLst>
+        </pc:picChg>
+        <pc:picChg chg="add mod ord modCrop">
+          <ac:chgData name="光 早坂" userId="ee7ba7153b69d20d" providerId="LiveId" clId="{B45034A4-39E7-40CC-89FD-F101C2A495B7}" dt="2026-07-14T01:20:24.440" v="106" actId="1076"/>
+          <ac:picMkLst>
+            <pc:docMk/>
+            <pc:sldMk cId="4059482414" sldId="257"/>
+            <ac:picMk id="15" creationId="{C84131F9-1E0D-2B38-24FC-2E2DF4689A03}"/>
+          </ac:picMkLst>
+        </pc:picChg>
+        <pc:picChg chg="add del mod ord modCrop">
+          <ac:chgData name="光 早坂" userId="ee7ba7153b69d20d" providerId="LiveId" clId="{B45034A4-39E7-40CC-89FD-F101C2A495B7}" dt="2026-07-14T01:17:34.639" v="92" actId="478"/>
+          <ac:picMkLst>
+            <pc:docMk/>
+            <pc:sldMk cId="4059482414" sldId="257"/>
+            <ac:picMk id="17" creationId="{AD40E80F-4012-7873-E6DA-7B01CD1DED41}"/>
+          </ac:picMkLst>
+        </pc:picChg>
+        <pc:picChg chg="add del">
+          <ac:chgData name="光 早坂" userId="ee7ba7153b69d20d" providerId="LiveId" clId="{B45034A4-39E7-40CC-89FD-F101C2A495B7}" dt="2026-07-14T01:17:27.032" v="85" actId="22"/>
+          <ac:picMkLst>
+            <pc:docMk/>
+            <pc:sldMk cId="4059482414" sldId="257"/>
+            <ac:picMk id="19" creationId="{C249EDD1-18CA-71C9-FF86-8953175EAA3D}"/>
+          </ac:picMkLst>
+        </pc:picChg>
+        <pc:picChg chg="add del">
+          <ac:chgData name="光 早坂" userId="ee7ba7153b69d20d" providerId="LiveId" clId="{B45034A4-39E7-40CC-89FD-F101C2A495B7}" dt="2026-07-14T01:17:28.760" v="87" actId="22"/>
+          <ac:picMkLst>
+            <pc:docMk/>
+            <pc:sldMk cId="4059482414" sldId="257"/>
+            <ac:picMk id="21" creationId="{42BADB79-D309-F02E-BB79-B4DD4F136315}"/>
+          </ac:picMkLst>
+        </pc:picChg>
+        <pc:picChg chg="add del">
+          <ac:chgData name="光 早坂" userId="ee7ba7153b69d20d" providerId="LiveId" clId="{B45034A4-39E7-40CC-89FD-F101C2A495B7}" dt="2026-07-14T01:17:29.952" v="89" actId="22"/>
+          <ac:picMkLst>
+            <pc:docMk/>
+            <pc:sldMk cId="4059482414" sldId="257"/>
+            <ac:picMk id="23" creationId="{63F23C0F-002B-0CD4-B36E-8F8C225EB73C}"/>
+          </ac:picMkLst>
+        </pc:picChg>
+        <pc:picChg chg="add mod ord modCrop">
+          <ac:chgData name="光 早坂" userId="ee7ba7153b69d20d" providerId="LiveId" clId="{B45034A4-39E7-40CC-89FD-F101C2A495B7}" dt="2026-07-14T01:20:24.440" v="106" actId="1076"/>
+          <ac:picMkLst>
+            <pc:docMk/>
+            <pc:sldMk cId="4059482414" sldId="257"/>
+            <ac:picMk id="25" creationId="{06E4775B-05CE-3FF4-398F-FBCE27ADA6D8}"/>
           </ac:picMkLst>
         </pc:picChg>
       </pc:sldChg>
@@ -3656,10 +3780,10 @@
       </p:grpSpPr>
       <p:pic>
         <p:nvPicPr>
-          <p:cNvPr id="5" name="図 4">
-            <a:extLst>
-              <a:ext uri="{FF2B5EF4-FFF2-40B4-BE49-F238E27FC236}">
-                <a16:creationId xmlns:a16="http://schemas.microsoft.com/office/drawing/2014/main" id="{D4302543-09E9-7619-4805-14B7613ED0AC}"/>
+          <p:cNvPr id="15" name="図 14">
+            <a:extLst>
+              <a:ext uri="{FF2B5EF4-FFF2-40B4-BE49-F238E27FC236}">
+                <a16:creationId xmlns:a16="http://schemas.microsoft.com/office/drawing/2014/main" id="{C84131F9-1E0D-2B38-24FC-2E2DF4689A03}"/>
               </a:ext>
             </a:extLst>
           </p:cNvPr>
@@ -3670,14 +3794,15 @@
         </p:nvPicPr>
         <p:blipFill>
           <a:blip r:embed="rId2"/>
+          <a:srcRect l="25767" t="13862" r="22753" b="56301"/>
           <a:stretch>
             <a:fillRect/>
           </a:stretch>
         </p:blipFill>
         <p:spPr>
           <a:xfrm>
-            <a:off x="477152" y="276797"/>
-            <a:ext cx="6237677" cy="2705171"/>
+            <a:off x="2207570" y="332656"/>
+            <a:ext cx="3265200" cy="2046189"/>
           </a:xfrm>
           <a:prstGeom prst="rect">
             <a:avLst/>
@@ -3689,7 +3814,7 @@
           <p:cNvPr id="7" name="図 6">
             <a:extLst>
               <a:ext uri="{FF2B5EF4-FFF2-40B4-BE49-F238E27FC236}">
-                <a16:creationId xmlns:a16="http://schemas.microsoft.com/office/drawing/2014/main" id="{54D215FB-FD4C-7670-5AF6-5215B9ABCB7D}"/>
+                <a16:creationId xmlns:a16="http://schemas.microsoft.com/office/drawing/2014/main" id="{95CA6781-FB63-C171-7349-BA10EFAB1099}"/>
               </a:ext>
             </a:extLst>
           </p:cNvPr>
@@ -3700,14 +3825,15 @@
         </p:nvPicPr>
         <p:blipFill>
           <a:blip r:embed="rId3"/>
+          <a:srcRect l="25767" t="13863" r="22753" b="54200"/>
           <a:stretch>
             <a:fillRect/>
           </a:stretch>
         </p:blipFill>
         <p:spPr>
           <a:xfrm>
-            <a:off x="660764" y="3326289"/>
-            <a:ext cx="6123374" cy="3254914"/>
+            <a:off x="2207568" y="332652"/>
+            <a:ext cx="3265200" cy="2190205"/>
           </a:xfrm>
           <a:prstGeom prst="rect">
             <a:avLst/>
@@ -3716,10 +3842,10 @@
       </p:pic>
       <p:pic>
         <p:nvPicPr>
-          <p:cNvPr id="9" name="図 8">
-            <a:extLst>
-              <a:ext uri="{FF2B5EF4-FFF2-40B4-BE49-F238E27FC236}">
-                <a16:creationId xmlns:a16="http://schemas.microsoft.com/office/drawing/2014/main" id="{CF031190-21E6-66E2-B896-2145DE77E491}"/>
+          <p:cNvPr id="25" name="図 24">
+            <a:extLst>
+              <a:ext uri="{FF2B5EF4-FFF2-40B4-BE49-F238E27FC236}">
+                <a16:creationId xmlns:a16="http://schemas.microsoft.com/office/drawing/2014/main" id="{06E4775B-05CE-3FF4-398F-FBCE27ADA6D8}"/>
               </a:ext>
             </a:extLst>
           </p:cNvPr>
@@ -3730,24 +3856,77 @@
         </p:nvPicPr>
         <p:blipFill>
           <a:blip r:embed="rId4"/>
+          <a:srcRect l="25767" t="13863" r="22753" b="61550"/>
           <a:stretch>
             <a:fillRect/>
           </a:stretch>
         </p:blipFill>
         <p:spPr>
           <a:xfrm>
-            <a:off x="7984107" y="556166"/>
-            <a:ext cx="3227699" cy="3625038"/>
+            <a:off x="2207568" y="332656"/>
+            <a:ext cx="3265200" cy="1686150"/>
           </a:xfrm>
           <a:prstGeom prst="rect">
             <a:avLst/>
           </a:prstGeom>
         </p:spPr>
       </p:pic>
+      <p:sp>
+        <p:nvSpPr>
+          <p:cNvPr id="9" name="正方形/長方形 8">
+            <a:extLst>
+              <a:ext uri="{FF2B5EF4-FFF2-40B4-BE49-F238E27FC236}">
+                <a16:creationId xmlns:a16="http://schemas.microsoft.com/office/drawing/2014/main" id="{AB039B30-9F3D-0932-DBD6-2A6F9118CDB8}"/>
+              </a:ext>
+            </a:extLst>
+          </p:cNvPr>
+          <p:cNvSpPr/>
+          <p:nvPr/>
+        </p:nvSpPr>
+        <p:spPr>
+          <a:xfrm>
+            <a:off x="2207569" y="332656"/>
+            <a:ext cx="3265200" cy="2190205"/>
+          </a:xfrm>
+          <a:prstGeom prst="rect">
+            <a:avLst/>
+          </a:prstGeom>
+          <a:noFill/>
+          <a:ln>
+            <a:solidFill>
+              <a:schemeClr val="tx1"/>
+            </a:solidFill>
+          </a:ln>
+        </p:spPr>
+        <p:style>
+          <a:lnRef idx="2">
+            <a:schemeClr val="accent1">
+              <a:shade val="15000"/>
+            </a:schemeClr>
+          </a:lnRef>
+          <a:fillRef idx="1">
+            <a:schemeClr val="accent1"/>
+          </a:fillRef>
+          <a:effectRef idx="0">
+            <a:schemeClr val="accent1"/>
+          </a:effectRef>
+          <a:fontRef idx="minor">
+            <a:schemeClr val="lt1"/>
+          </a:fontRef>
+        </p:style>
+        <p:txBody>
+          <a:bodyPr rtlCol="0" anchor="ctr"/>
+          <a:lstStyle/>
+          <a:p>
+            <a:pPr algn="ctr"/>
+            <a:endParaRPr kumimoji="1" lang="ja-JP" altLang="en-US" dirty="0"/>
+          </a:p>
+        </p:txBody>
+      </p:sp>
     </p:spTree>
     <p:extLst>
       <p:ext uri="{BB962C8B-B14F-4D97-AF65-F5344CB8AC3E}">
-        <p14:creationId xmlns:p14="http://schemas.microsoft.com/office/powerpoint/2010/main" val="3057863855"/>
+        <p14:creationId xmlns:p14="http://schemas.microsoft.com/office/powerpoint/2010/main" val="4059482414"/>
       </p:ext>
     </p:extLst>
   </p:cSld>

--- a/images/Image.pptx
+++ b/images/Image.pptx
@@ -125,7 +125,7 @@
   <pc:docChgLst>
     <pc:chgData name="光 早坂" userId="ee7ba7153b69d20d" providerId="LiveId" clId="{B45034A4-39E7-40CC-89FD-F101C2A495B7}"/>
     <pc:docChg chg="undo custSel addSld delSld modSld">
-      <pc:chgData name="光 早坂" userId="ee7ba7153b69d20d" providerId="LiveId" clId="{B45034A4-39E7-40CC-89FD-F101C2A495B7}" dt="2026-07-14T01:20:27.996" v="107" actId="47"/>
+      <pc:chgData name="光 早坂" userId="ee7ba7153b69d20d" providerId="LiveId" clId="{B45034A4-39E7-40CC-89FD-F101C2A495B7}" dt="2026-07-14T01:28:42.158" v="120" actId="1076"/>
       <pc:docMkLst>
         <pc:docMk/>
       </pc:docMkLst>
@@ -161,7 +161,7 @@
         </pc:picChg>
       </pc:sldChg>
       <pc:sldChg chg="addSp delSp modSp new mod">
-        <pc:chgData name="光 早坂" userId="ee7ba7153b69d20d" providerId="LiveId" clId="{B45034A4-39E7-40CC-89FD-F101C2A495B7}" dt="2026-07-14T01:20:24.440" v="106" actId="1076"/>
+        <pc:chgData name="光 早坂" userId="ee7ba7153b69d20d" providerId="LiveId" clId="{B45034A4-39E7-40CC-89FD-F101C2A495B7}" dt="2026-07-14T01:28:42.158" v="120" actId="1076"/>
         <pc:sldMkLst>
           <pc:docMk/>
           <pc:sldMk cId="4059482414" sldId="257"/>
@@ -174,8 +174,8 @@
             <ac:spMk id="8" creationId="{A1D7DB97-393C-87F4-119C-CDAEFEE06BF7}"/>
           </ac:spMkLst>
         </pc:spChg>
-        <pc:spChg chg="add mod">
-          <ac:chgData name="光 早坂" userId="ee7ba7153b69d20d" providerId="LiveId" clId="{B45034A4-39E7-40CC-89FD-F101C2A495B7}" dt="2026-07-14T01:20:24.440" v="106" actId="1076"/>
+        <pc:spChg chg="add del mod">
+          <ac:chgData name="光 早坂" userId="ee7ba7153b69d20d" providerId="LiveId" clId="{B45034A4-39E7-40CC-89FD-F101C2A495B7}" dt="2026-07-14T01:28:42.158" v="120" actId="1076"/>
           <ac:spMkLst>
             <pc:docMk/>
             <pc:sldMk cId="4059482414" sldId="257"/>
@@ -199,7 +199,7 @@
           </ac:picMkLst>
         </pc:picChg>
         <pc:picChg chg="add mod ord modCrop">
-          <ac:chgData name="光 早坂" userId="ee7ba7153b69d20d" providerId="LiveId" clId="{B45034A4-39E7-40CC-89FD-F101C2A495B7}" dt="2026-07-14T01:20:24.440" v="106" actId="1076"/>
+          <ac:chgData name="光 早坂" userId="ee7ba7153b69d20d" providerId="LiveId" clId="{B45034A4-39E7-40CC-89FD-F101C2A495B7}" dt="2026-07-14T01:28:22.544" v="119" actId="167"/>
           <ac:picMkLst>
             <pc:docMk/>
             <pc:sldMk cId="4059482414" sldId="257"/>
@@ -223,7 +223,7 @@
           </ac:picMkLst>
         </pc:picChg>
         <pc:picChg chg="add mod ord modCrop">
-          <ac:chgData name="光 早坂" userId="ee7ba7153b69d20d" providerId="LiveId" clId="{B45034A4-39E7-40CC-89FD-F101C2A495B7}" dt="2026-07-14T01:20:24.440" v="106" actId="1076"/>
+          <ac:chgData name="光 早坂" userId="ee7ba7153b69d20d" providerId="LiveId" clId="{B45034A4-39E7-40CC-89FD-F101C2A495B7}" dt="2026-07-14T01:26:46.904" v="108" actId="14100"/>
           <ac:picMkLst>
             <pc:docMk/>
             <pc:sldMk cId="4059482414" sldId="257"/>
@@ -263,7 +263,7 @@
           </ac:picMkLst>
         </pc:picChg>
         <pc:picChg chg="add mod ord modCrop">
-          <ac:chgData name="光 早坂" userId="ee7ba7153b69d20d" providerId="LiveId" clId="{B45034A4-39E7-40CC-89FD-F101C2A495B7}" dt="2026-07-14T01:20:24.440" v="106" actId="1076"/>
+          <ac:chgData name="光 早坂" userId="ee7ba7153b69d20d" providerId="LiveId" clId="{B45034A4-39E7-40CC-89FD-F101C2A495B7}" dt="2026-07-14T01:28:06.450" v="118" actId="167"/>
           <ac:picMkLst>
             <pc:docMk/>
             <pc:sldMk cId="4059482414" sldId="257"/>
@@ -3780,10 +3780,10 @@
       </p:grpSpPr>
       <p:pic>
         <p:nvPicPr>
-          <p:cNvPr id="15" name="図 14">
-            <a:extLst>
-              <a:ext uri="{FF2B5EF4-FFF2-40B4-BE49-F238E27FC236}">
-                <a16:creationId xmlns:a16="http://schemas.microsoft.com/office/drawing/2014/main" id="{C84131F9-1E0D-2B38-24FC-2E2DF4689A03}"/>
+          <p:cNvPr id="7" name="図 6">
+            <a:extLst>
+              <a:ext uri="{FF2B5EF4-FFF2-40B4-BE49-F238E27FC236}">
+                <a16:creationId xmlns:a16="http://schemas.microsoft.com/office/drawing/2014/main" id="{95CA6781-FB63-C171-7349-BA10EFAB1099}"/>
               </a:ext>
             </a:extLst>
           </p:cNvPr>
@@ -3794,37 +3794,6 @@
         </p:nvPicPr>
         <p:blipFill>
           <a:blip r:embed="rId2"/>
-          <a:srcRect l="25767" t="13862" r="22753" b="56301"/>
-          <a:stretch>
-            <a:fillRect/>
-          </a:stretch>
-        </p:blipFill>
-        <p:spPr>
-          <a:xfrm>
-            <a:off x="2207570" y="332656"/>
-            <a:ext cx="3265200" cy="2046189"/>
-          </a:xfrm>
-          <a:prstGeom prst="rect">
-            <a:avLst/>
-          </a:prstGeom>
-        </p:spPr>
-      </p:pic>
-      <p:pic>
-        <p:nvPicPr>
-          <p:cNvPr id="7" name="図 6">
-            <a:extLst>
-              <a:ext uri="{FF2B5EF4-FFF2-40B4-BE49-F238E27FC236}">
-                <a16:creationId xmlns:a16="http://schemas.microsoft.com/office/drawing/2014/main" id="{95CA6781-FB63-C171-7349-BA10EFAB1099}"/>
-              </a:ext>
-            </a:extLst>
-          </p:cNvPr>
-          <p:cNvPicPr>
-            <a:picLocks noChangeAspect="1"/>
-          </p:cNvPicPr>
-          <p:nvPr/>
-        </p:nvPicPr>
-        <p:blipFill>
-          <a:blip r:embed="rId3"/>
           <a:srcRect l="25767" t="13863" r="22753" b="54200"/>
           <a:stretch>
             <a:fillRect/>
@@ -3833,7 +3802,7 @@
         <p:spPr>
           <a:xfrm>
             <a:off x="2207568" y="332652"/>
-            <a:ext cx="3265200" cy="2190205"/>
+            <a:ext cx="7200000" cy="4829559"/>
           </a:xfrm>
           <a:prstGeom prst="rect">
             <a:avLst/>
@@ -3855,7 +3824,7 @@
           <p:nvPr/>
         </p:nvPicPr>
         <p:blipFill>
-          <a:blip r:embed="rId4"/>
+          <a:blip r:embed="rId3"/>
           <a:srcRect l="25767" t="13863" r="22753" b="61550"/>
           <a:stretch>
             <a:fillRect/>
@@ -3864,13 +3833,44 @@
         <p:spPr>
           <a:xfrm>
             <a:off x="2207568" y="332656"/>
-            <a:ext cx="3265200" cy="1686150"/>
+            <a:ext cx="7200000" cy="3718082"/>
           </a:xfrm>
           <a:prstGeom prst="rect">
             <a:avLst/>
           </a:prstGeom>
         </p:spPr>
       </p:pic>
+      <p:pic>
+        <p:nvPicPr>
+          <p:cNvPr id="15" name="図 14">
+            <a:extLst>
+              <a:ext uri="{FF2B5EF4-FFF2-40B4-BE49-F238E27FC236}">
+                <a16:creationId xmlns:a16="http://schemas.microsoft.com/office/drawing/2014/main" id="{C84131F9-1E0D-2B38-24FC-2E2DF4689A03}"/>
+              </a:ext>
+            </a:extLst>
+          </p:cNvPr>
+          <p:cNvPicPr>
+            <a:picLocks noChangeAspect="1"/>
+          </p:cNvPicPr>
+          <p:nvPr/>
+        </p:nvPicPr>
+        <p:blipFill>
+          <a:blip r:embed="rId4"/>
+          <a:srcRect l="25767" t="13862" r="22753" b="56301"/>
+          <a:stretch>
+            <a:fillRect/>
+          </a:stretch>
+        </p:blipFill>
+        <p:spPr>
+          <a:xfrm>
+            <a:off x="2207570" y="332656"/>
+            <a:ext cx="7200000" cy="4511993"/>
+          </a:xfrm>
+          <a:prstGeom prst="rect">
+            <a:avLst/>
+          </a:prstGeom>
+        </p:spPr>
+      </p:pic>
       <p:sp>
         <p:nvSpPr>
           <p:cNvPr id="9" name="正方形/長方形 8">
@@ -3885,8 +3885,8 @@
         </p:nvSpPr>
         <p:spPr>
           <a:xfrm>
-            <a:off x="2207569" y="332656"/>
-            <a:ext cx="3265200" cy="2190205"/>
+            <a:off x="2207569" y="188640"/>
+            <a:ext cx="7200000" cy="2190205"/>
           </a:xfrm>
           <a:prstGeom prst="rect">
             <a:avLst/>

--- a/images/Image.pptx
+++ b/images/Image.pptx
@@ -125,7 +125,7 @@
   <pc:docChgLst>
     <pc:chgData name="光 早坂" userId="ee7ba7153b69d20d" providerId="LiveId" clId="{B45034A4-39E7-40CC-89FD-F101C2A495B7}"/>
     <pc:docChg chg="undo custSel addSld delSld modSld">
-      <pc:chgData name="光 早坂" userId="ee7ba7153b69d20d" providerId="LiveId" clId="{B45034A4-39E7-40CC-89FD-F101C2A495B7}" dt="2026-07-14T01:28:42.158" v="120" actId="1076"/>
+      <pc:chgData name="光 早坂" userId="ee7ba7153b69d20d" providerId="LiveId" clId="{B45034A4-39E7-40CC-89FD-F101C2A495B7}" dt="2026-07-14T01:55:16.807" v="133" actId="478"/>
       <pc:docMkLst>
         <pc:docMk/>
       </pc:docMkLst>
@@ -161,7 +161,7 @@
         </pc:picChg>
       </pc:sldChg>
       <pc:sldChg chg="addSp delSp modSp new mod">
-        <pc:chgData name="光 早坂" userId="ee7ba7153b69d20d" providerId="LiveId" clId="{B45034A4-39E7-40CC-89FD-F101C2A495B7}" dt="2026-07-14T01:28:42.158" v="120" actId="1076"/>
+        <pc:chgData name="光 早坂" userId="ee7ba7153b69d20d" providerId="LiveId" clId="{B45034A4-39E7-40CC-89FD-F101C2A495B7}" dt="2026-07-14T01:55:16.807" v="133" actId="478"/>
         <pc:sldMkLst>
           <pc:docMk/>
           <pc:sldMk cId="4059482414" sldId="257"/>
@@ -190,6 +190,14 @@
             <ac:picMk id="3" creationId="{038CC6F0-2202-2991-1C17-3B8D256B3858}"/>
           </ac:picMkLst>
         </pc:picChg>
+        <pc:picChg chg="add del">
+          <ac:chgData name="光 早坂" userId="ee7ba7153b69d20d" providerId="LiveId" clId="{B45034A4-39E7-40CC-89FD-F101C2A495B7}" dt="2026-07-14T01:55:05.943" v="128" actId="22"/>
+          <ac:picMkLst>
+            <pc:docMk/>
+            <pc:sldMk cId="4059482414" sldId="257"/>
+            <ac:picMk id="3" creationId="{580EB561-7F95-0F4C-0D94-426E1113D70D}"/>
+          </ac:picMkLst>
+        </pc:picChg>
         <pc:picChg chg="add del mod ord">
           <ac:chgData name="光 早坂" userId="ee7ba7153b69d20d" providerId="LiveId" clId="{B45034A4-39E7-40CC-89FD-F101C2A495B7}" dt="2026-07-14T01:12:04.289" v="35" actId="478"/>
           <ac:picMkLst>
@@ -198,8 +206,16 @@
             <ac:picMk id="5" creationId="{A23A1936-0B24-33E3-B7B5-CBC5F1AA0AA1}"/>
           </ac:picMkLst>
         </pc:picChg>
-        <pc:picChg chg="add mod ord modCrop">
-          <ac:chgData name="光 早坂" userId="ee7ba7153b69d20d" providerId="LiveId" clId="{B45034A4-39E7-40CC-89FD-F101C2A495B7}" dt="2026-07-14T01:28:22.544" v="119" actId="167"/>
+        <pc:picChg chg="add del">
+          <ac:chgData name="光 早坂" userId="ee7ba7153b69d20d" providerId="LiveId" clId="{B45034A4-39E7-40CC-89FD-F101C2A495B7}" dt="2026-07-14T01:55:05.575" v="127" actId="22"/>
+          <ac:picMkLst>
+            <pc:docMk/>
+            <pc:sldMk cId="4059482414" sldId="257"/>
+            <ac:picMk id="5" creationId="{F32B209E-63AB-ABC5-5BF0-5EBF7C4C947F}"/>
+          </ac:picMkLst>
+        </pc:picChg>
+        <pc:picChg chg="add del mod ord modCrop">
+          <ac:chgData name="光 早坂" userId="ee7ba7153b69d20d" providerId="LiveId" clId="{B45034A4-39E7-40CC-89FD-F101C2A495B7}" dt="2026-07-14T01:55:16.807" v="133" actId="478"/>
           <ac:picMkLst>
             <pc:docMk/>
             <pc:sldMk cId="4059482414" sldId="257"/>
@@ -222,8 +238,8 @@
             <ac:picMk id="13" creationId="{08025D7F-0C60-DA56-5531-E845C5680001}"/>
           </ac:picMkLst>
         </pc:picChg>
-        <pc:picChg chg="add mod ord modCrop">
-          <ac:chgData name="光 早坂" userId="ee7ba7153b69d20d" providerId="LiveId" clId="{B45034A4-39E7-40CC-89FD-F101C2A495B7}" dt="2026-07-14T01:26:46.904" v="108" actId="14100"/>
+        <pc:picChg chg="add del mod ord modCrop">
+          <ac:chgData name="光 早坂" userId="ee7ba7153b69d20d" providerId="LiveId" clId="{B45034A4-39E7-40CC-89FD-F101C2A495B7}" dt="2026-07-14T01:55:15.184" v="132" actId="478"/>
           <ac:picMkLst>
             <pc:docMk/>
             <pc:sldMk cId="4059482414" sldId="257"/>
@@ -262,8 +278,8 @@
             <ac:picMk id="23" creationId="{63F23C0F-002B-0CD4-B36E-8F8C225EB73C}"/>
           </ac:picMkLst>
         </pc:picChg>
-        <pc:picChg chg="add mod ord modCrop">
-          <ac:chgData name="光 早坂" userId="ee7ba7153b69d20d" providerId="LiveId" clId="{B45034A4-39E7-40CC-89FD-F101C2A495B7}" dt="2026-07-14T01:28:06.450" v="118" actId="167"/>
+        <pc:picChg chg="add del mod ord modCrop">
+          <ac:chgData name="光 早坂" userId="ee7ba7153b69d20d" providerId="LiveId" clId="{B45034A4-39E7-40CC-89FD-F101C2A495B7}" dt="2026-07-14T01:55:14.839" v="131" actId="1076"/>
           <ac:picMkLst>
             <pc:docMk/>
             <pc:sldMk cId="4059482414" sldId="257"/>
@@ -3863,7 +3879,7 @@
         </p:blipFill>
         <p:spPr>
           <a:xfrm>
-            <a:off x="2207570" y="332656"/>
+            <a:off x="2207570" y="-513390"/>
             <a:ext cx="7200000" cy="4511993"/>
           </a:xfrm>
           <a:prstGeom prst="rect">
